--- a/Диплом/PRI-120-VKR-Presentation-Parakhin.pptx
+++ b/Диплом/PRI-120-VKR-Presentation-Parakhin.pptx
@@ -854,7 +854,7 @@
           <a:p>
             <a:fld id="{66F25B80-0EC7-419D-82EA-845F041FDB47}" type="datetimeFigureOut">
               <a:rPr lang="ru-RU" smtClean="0"/>
-              <a:t>22.05.2024</a:t>
+              <a:t>07.06.2024</a:t>
             </a:fld>
             <a:endParaRPr lang="ru-RU"/>
           </a:p>
@@ -1105,7 +1105,7 @@
           <a:p>
             <a:fld id="{66F25B80-0EC7-419D-82EA-845F041FDB47}" type="datetimeFigureOut">
               <a:rPr lang="ru-RU" smtClean="0"/>
-              <a:t>22.05.2024</a:t>
+              <a:t>07.06.2024</a:t>
             </a:fld>
             <a:endParaRPr lang="ru-RU"/>
           </a:p>
@@ -1419,7 +1419,7 @@
           <a:p>
             <a:fld id="{66F25B80-0EC7-419D-82EA-845F041FDB47}" type="datetimeFigureOut">
               <a:rPr lang="ru-RU" smtClean="0"/>
-              <a:t>22.05.2024</a:t>
+              <a:t>07.06.2024</a:t>
             </a:fld>
             <a:endParaRPr lang="ru-RU"/>
           </a:p>
@@ -1760,7 +1760,7 @@
           <a:p>
             <a:fld id="{66F25B80-0EC7-419D-82EA-845F041FDB47}" type="datetimeFigureOut">
               <a:rPr lang="ru-RU" smtClean="0"/>
-              <a:t>22.05.2024</a:t>
+              <a:t>07.06.2024</a:t>
             </a:fld>
             <a:endParaRPr lang="ru-RU"/>
           </a:p>
@@ -2074,7 +2074,7 @@
           <a:p>
             <a:fld id="{66F25B80-0EC7-419D-82EA-845F041FDB47}" type="datetimeFigureOut">
               <a:rPr lang="ru-RU" smtClean="0"/>
-              <a:t>22.05.2024</a:t>
+              <a:t>07.06.2024</a:t>
             </a:fld>
             <a:endParaRPr lang="ru-RU"/>
           </a:p>
@@ -2467,7 +2467,7 @@
           <a:p>
             <a:fld id="{66F25B80-0EC7-419D-82EA-845F041FDB47}" type="datetimeFigureOut">
               <a:rPr lang="ru-RU" smtClean="0"/>
-              <a:t>22.05.2024</a:t>
+              <a:t>07.06.2024</a:t>
             </a:fld>
             <a:endParaRPr lang="ru-RU"/>
           </a:p>
@@ -2637,7 +2637,7 @@
           <a:p>
             <a:fld id="{66F25B80-0EC7-419D-82EA-845F041FDB47}" type="datetimeFigureOut">
               <a:rPr lang="ru-RU" smtClean="0"/>
-              <a:t>22.05.2024</a:t>
+              <a:t>07.06.2024</a:t>
             </a:fld>
             <a:endParaRPr lang="ru-RU"/>
           </a:p>
@@ -2817,7 +2817,7 @@
           <a:p>
             <a:fld id="{66F25B80-0EC7-419D-82EA-845F041FDB47}" type="datetimeFigureOut">
               <a:rPr lang="ru-RU" smtClean="0"/>
-              <a:t>22.05.2024</a:t>
+              <a:t>07.06.2024</a:t>
             </a:fld>
             <a:endParaRPr lang="ru-RU"/>
           </a:p>
@@ -2993,7 +2993,7 @@
           <a:p>
             <a:fld id="{66F25B80-0EC7-419D-82EA-845F041FDB47}" type="datetimeFigureOut">
               <a:rPr lang="ru-RU" smtClean="0"/>
-              <a:t>22.05.2024</a:t>
+              <a:t>07.06.2024</a:t>
             </a:fld>
             <a:endParaRPr lang="ru-RU"/>
           </a:p>
@@ -3240,7 +3240,7 @@
           <a:p>
             <a:fld id="{66F25B80-0EC7-419D-82EA-845F041FDB47}" type="datetimeFigureOut">
               <a:rPr lang="ru-RU" smtClean="0"/>
-              <a:t>22.05.2024</a:t>
+              <a:t>07.06.2024</a:t>
             </a:fld>
             <a:endParaRPr lang="ru-RU"/>
           </a:p>
@@ -3472,7 +3472,7 @@
           <a:p>
             <a:fld id="{66F25B80-0EC7-419D-82EA-845F041FDB47}" type="datetimeFigureOut">
               <a:rPr lang="ru-RU" smtClean="0"/>
-              <a:t>22.05.2024</a:t>
+              <a:t>07.06.2024</a:t>
             </a:fld>
             <a:endParaRPr lang="ru-RU"/>
           </a:p>
@@ -3846,7 +3846,7 @@
           <a:p>
             <a:fld id="{66F25B80-0EC7-419D-82EA-845F041FDB47}" type="datetimeFigureOut">
               <a:rPr lang="ru-RU" smtClean="0"/>
-              <a:t>22.05.2024</a:t>
+              <a:t>07.06.2024</a:t>
             </a:fld>
             <a:endParaRPr lang="ru-RU"/>
           </a:p>
@@ -3969,7 +3969,7 @@
           <a:p>
             <a:fld id="{66F25B80-0EC7-419D-82EA-845F041FDB47}" type="datetimeFigureOut">
               <a:rPr lang="ru-RU" smtClean="0"/>
-              <a:t>22.05.2024</a:t>
+              <a:t>07.06.2024</a:t>
             </a:fld>
             <a:endParaRPr lang="ru-RU"/>
           </a:p>
@@ -4064,7 +4064,7 @@
           <a:p>
             <a:fld id="{66F25B80-0EC7-419D-82EA-845F041FDB47}" type="datetimeFigureOut">
               <a:rPr lang="ru-RU" smtClean="0"/>
-              <a:t>22.05.2024</a:t>
+              <a:t>07.06.2024</a:t>
             </a:fld>
             <a:endParaRPr lang="ru-RU"/>
           </a:p>
@@ -4319,7 +4319,7 @@
           <a:p>
             <a:fld id="{66F25B80-0EC7-419D-82EA-845F041FDB47}" type="datetimeFigureOut">
               <a:rPr lang="ru-RU" smtClean="0"/>
-              <a:t>22.05.2024</a:t>
+              <a:t>07.06.2024</a:t>
             </a:fld>
             <a:endParaRPr lang="ru-RU"/>
           </a:p>
@@ -4582,7 +4582,7 @@
           <a:p>
             <a:fld id="{66F25B80-0EC7-419D-82EA-845F041FDB47}" type="datetimeFigureOut">
               <a:rPr lang="ru-RU" smtClean="0"/>
-              <a:t>22.05.2024</a:t>
+              <a:t>07.06.2024</a:t>
             </a:fld>
             <a:endParaRPr lang="ru-RU"/>
           </a:p>
@@ -5325,7 +5325,7 @@
           <a:p>
             <a:fld id="{66F25B80-0EC7-419D-82EA-845F041FDB47}" type="datetimeFigureOut">
               <a:rPr lang="ru-RU" smtClean="0"/>
-              <a:t>22.05.2024</a:t>
+              <a:t>07.06.2024</a:t>
             </a:fld>
             <a:endParaRPr lang="ru-RU"/>
           </a:p>
@@ -5876,7 +5876,6 @@
               <a:rPr lang="ru-RU" sz="2200" dirty="0" smtClean="0"/>
               <a:t>Тема выпускной квалификационной работы</a:t>
             </a:r>
-            <a:endParaRPr lang="ru-RU" sz="2200" dirty="0" smtClean="0"/>
           </a:p>
           <a:p>
             <a:pPr algn="ctr"/>
@@ -6308,21 +6307,7 @@
                 <a:latin typeface="Times New Roman" panose="02020603050405020304" pitchFamily="18" charset="0"/>
                 <a:cs typeface="Times New Roman" panose="02020603050405020304" pitchFamily="18" charset="0"/>
               </a:rPr>
-              <a:t>Научный р</a:t>
-            </a:r>
-            <a:r>
-              <a:rPr lang="ru-RU" sz="2400" dirty="0" smtClean="0">
-                <a:latin typeface="Times New Roman" panose="02020603050405020304" pitchFamily="18" charset="0"/>
-                <a:cs typeface="Times New Roman" panose="02020603050405020304" pitchFamily="18" charset="0"/>
-              </a:rPr>
-              <a:t>уководитель</a:t>
-            </a:r>
-            <a:r>
-              <a:rPr lang="ru-RU" sz="2400" dirty="0" smtClean="0">
-                <a:latin typeface="Times New Roman" panose="02020603050405020304" pitchFamily="18" charset="0"/>
-                <a:cs typeface="Times New Roman" panose="02020603050405020304" pitchFamily="18" charset="0"/>
-              </a:rPr>
-              <a:t>: </a:t>
+              <a:t>Научный руководитель: </a:t>
             </a:r>
           </a:p>
           <a:p>
@@ -7931,11 +7916,7 @@
           <a:p>
             <a:r>
               <a:rPr lang="ru-RU" sz="2400" dirty="0" smtClean="0"/>
-              <a:t>Функционал по работе с </a:t>
-            </a:r>
-            <a:r>
-              <a:rPr lang="ru-RU" sz="2400" dirty="0" smtClean="0"/>
-              <a:t>отчетами</a:t>
+              <a:t>Функционал по работе с отчетами</a:t>
             </a:r>
             <a:endParaRPr lang="ru-RU" sz="2400" dirty="0"/>
           </a:p>
@@ -7980,7 +7961,7 @@
         </p:blipFill>
         <p:spPr>
           <a:xfrm>
-            <a:off x="889265" y="1053738"/>
+            <a:off x="1172293" y="1053738"/>
             <a:ext cx="3240722" cy="5126172"/>
           </a:xfrm>
           <a:prstGeom prst="rect">
@@ -7990,26 +7971,22 @@
       </p:pic>
       <p:pic>
         <p:nvPicPr>
-          <p:cNvPr id="9" name="Рисунок 8"/>
-          <p:cNvPicPr/>
+          <p:cNvPr id="4" name="Рисунок 3"/>
+          <p:cNvPicPr>
+            <a:picLocks noChangeAspect="1"/>
+          </p:cNvPicPr>
           <p:nvPr/>
         </p:nvPicPr>
         <p:blipFill>
-          <a:blip r:embed="rId3">
-            <a:extLst>
-              <a:ext uri="{28A0092B-C50C-407E-A947-70E740481C1C}">
-                <a14:useLocalDpi xmlns:a14="http://schemas.microsoft.com/office/drawing/2010/main" val="0"/>
-              </a:ext>
-            </a:extLst>
-          </a:blip>
+          <a:blip r:embed="rId3"/>
           <a:stretch>
             <a:fillRect/>
           </a:stretch>
         </p:blipFill>
         <p:spPr>
           <a:xfrm>
-            <a:off x="4807131" y="1053737"/>
-            <a:ext cx="3580629" cy="5381897"/>
+            <a:off x="5206365" y="940299"/>
+            <a:ext cx="3486150" cy="5353050"/>
           </a:xfrm>
           <a:prstGeom prst="rect">
             <a:avLst/>
@@ -8300,13 +8277,8 @@
             <a:pPr lvl="1"/>
             <a:r>
               <a:rPr lang="ru-RU" sz="1800" dirty="0" smtClean="0"/>
-              <a:t>Развертывание и </a:t>
-            </a:r>
-            <a:r>
-              <a:rPr lang="ru-RU" sz="1800" dirty="0" smtClean="0"/>
-              <a:t>подключение сотрудников</a:t>
-            </a:r>
-            <a:endParaRPr lang="ru-RU" sz="1800" dirty="0" smtClean="0"/>
+              <a:t>Развертывание и подключение сотрудников</a:t>
+            </a:r>
           </a:p>
         </p:txBody>
       </p:sp>
@@ -8430,7 +8402,7 @@
           <p:nvPr>
             <p:extLst>
               <p:ext uri="{D42A27DB-BD31-4B8C-83A1-F6EECF244321}">
-                <p14:modId xmlns:p14="http://schemas.microsoft.com/office/powerpoint/2010/main" val="1287974705"/>
+                <p14:modId xmlns:p14="http://schemas.microsoft.com/office/powerpoint/2010/main" val="1951529232"/>
               </p:ext>
             </p:extLst>
           </p:nvPr>
@@ -9574,12 +9546,36 @@
                         </a:spcAft>
                       </a:pPr>
                       <a:r>
-                        <a:rPr lang="ru-RU" sz="1100">
+                        <a:rPr lang="ru-RU" sz="1100" dirty="0">
                           <a:effectLst/>
                         </a:rPr>
-                        <a:t>Итого (5 мес.)</a:t>
-                      </a:r>
-                      <a:endParaRPr lang="en-US" sz="1100">
+                        <a:t>Итого </a:t>
+                      </a:r>
+                      <a:r>
+                        <a:rPr lang="ru-RU" sz="1100" dirty="0" smtClean="0">
+                          <a:effectLst/>
+                        </a:rPr>
+                        <a:t>(</a:t>
+                      </a:r>
+                      <a:r>
+                        <a:rPr lang="en-US" sz="1100" dirty="0" smtClean="0">
+                          <a:effectLst/>
+                        </a:rPr>
+                        <a:t>3,</a:t>
+                      </a:r>
+                      <a:r>
+                        <a:rPr lang="ru-RU" sz="1100" dirty="0" smtClean="0">
+                          <a:effectLst/>
+                        </a:rPr>
+                        <a:t>5 </a:t>
+                      </a:r>
+                      <a:r>
+                        <a:rPr lang="ru-RU" sz="1100" dirty="0">
+                          <a:effectLst/>
+                        </a:rPr>
+                        <a:t>мес.)</a:t>
+                      </a:r>
+                      <a:endParaRPr lang="en-US" sz="1100" dirty="0">
                         <a:effectLst/>
                         <a:latin typeface="Times New Roman" panose="02020603050405020304" pitchFamily="18" charset="0"/>
                         <a:ea typeface="Times New Roman" panose="02020603050405020304" pitchFamily="18" charset="0"/>
@@ -9709,24 +9705,30 @@
                         </a:spcAft>
                       </a:pPr>
                       <a:r>
-                        <a:rPr lang="ru-RU" sz="1100">
+                        <a:rPr lang="en-US" sz="1100" dirty="0" smtClean="0">
                           <a:effectLst/>
                         </a:rPr>
-                        <a:t>100</a:t>
-                      </a:r>
-                      <a:r>
-                        <a:rPr lang="ru-RU" sz="1100" spc="-15">
+                        <a:t>7</a:t>
+                      </a:r>
+                      <a:r>
+                        <a:rPr lang="ru-RU" sz="1100" dirty="0" smtClean="0">
+                          <a:effectLst/>
+                        </a:rPr>
+                        <a:t>0</a:t>
+                      </a:r>
+                      <a:r>
+                        <a:rPr lang="ru-RU" sz="1100" spc="-15" dirty="0" smtClean="0">
                           <a:effectLst/>
                         </a:rPr>
                         <a:t> </a:t>
                       </a:r>
                       <a:r>
-                        <a:rPr lang="ru-RU" sz="1100">
+                        <a:rPr lang="ru-RU" sz="1100" dirty="0">
                           <a:effectLst/>
                         </a:rPr>
                         <a:t>000</a:t>
                       </a:r>
-                      <a:endParaRPr lang="en-US" sz="1100">
+                      <a:endParaRPr lang="en-US" sz="1100" dirty="0">
                         <a:effectLst/>
                         <a:latin typeface="Times New Roman" panose="02020603050405020304" pitchFamily="18" charset="0"/>
                         <a:ea typeface="Times New Roman" panose="02020603050405020304" pitchFamily="18" charset="0"/>
@@ -9967,12 +9969,36 @@
                         </a:spcAft>
                       </a:pPr>
                       <a:r>
-                        <a:rPr lang="ru-RU" sz="1100">
+                        <a:rPr lang="ru-RU" sz="1100" dirty="0">
                           <a:effectLst/>
                         </a:rPr>
-                        <a:t>Итого (5 мес.)</a:t>
-                      </a:r>
-                      <a:endParaRPr lang="en-US" sz="1100">
+                        <a:t>Итого </a:t>
+                      </a:r>
+                      <a:r>
+                        <a:rPr lang="ru-RU" sz="1100" dirty="0" smtClean="0">
+                          <a:effectLst/>
+                        </a:rPr>
+                        <a:t>(</a:t>
+                      </a:r>
+                      <a:r>
+                        <a:rPr lang="en-US" sz="1100" dirty="0" smtClean="0">
+                          <a:effectLst/>
+                        </a:rPr>
+                        <a:t>3,</a:t>
+                      </a:r>
+                      <a:r>
+                        <a:rPr lang="ru-RU" sz="1100" dirty="0" smtClean="0">
+                          <a:effectLst/>
+                        </a:rPr>
+                        <a:t>5 </a:t>
+                      </a:r>
+                      <a:r>
+                        <a:rPr lang="ru-RU" sz="1100" dirty="0">
+                          <a:effectLst/>
+                        </a:rPr>
+                        <a:t>мес.)</a:t>
+                      </a:r>
+                      <a:endParaRPr lang="en-US" sz="1100" dirty="0">
                         <a:effectLst/>
                         <a:latin typeface="Times New Roman" panose="02020603050405020304" pitchFamily="18" charset="0"/>
                         <a:ea typeface="Times New Roman" panose="02020603050405020304" pitchFamily="18" charset="0"/>
@@ -10114,12 +10140,18 @@
                         </a:spcAft>
                       </a:pPr>
                       <a:r>
-                        <a:rPr lang="ru-RU" sz="1100">
+                        <a:rPr lang="en-US" sz="1100" dirty="0" smtClean="0">
                           <a:effectLst/>
                         </a:rPr>
-                        <a:t>3 000</a:t>
-                      </a:r>
-                      <a:endParaRPr lang="en-US" sz="1100">
+                        <a:t>2 7</a:t>
+                      </a:r>
+                      <a:r>
+                        <a:rPr lang="ru-RU" sz="1100" dirty="0" smtClean="0">
+                          <a:effectLst/>
+                        </a:rPr>
+                        <a:t>00</a:t>
+                      </a:r>
+                      <a:endParaRPr lang="en-US" sz="1100" dirty="0">
                         <a:effectLst/>
                         <a:latin typeface="Times New Roman" panose="02020603050405020304" pitchFamily="18" charset="0"/>
                         <a:ea typeface="Times New Roman" panose="02020603050405020304" pitchFamily="18" charset="0"/>
@@ -10179,10 +10211,28 @@
                         </a:spcAft>
                       </a:pPr>
                       <a:r>
+                        <a:rPr lang="en-US" sz="1400" dirty="0" smtClean="0">
+                          <a:effectLst/>
+                        </a:rPr>
+                        <a:t>480</a:t>
+                      </a:r>
+                      <a:r>
+                        <a:rPr lang="en-US" sz="1400" baseline="0" dirty="0" smtClean="0">
+                          <a:effectLst/>
+                        </a:rPr>
+                        <a:t> 9</a:t>
+                      </a:r>
+                      <a:r>
+                        <a:rPr lang="ru-RU" sz="1400" dirty="0" smtClean="0">
+                          <a:effectLst/>
+                        </a:rPr>
+                        <a:t>40 </a:t>
+                      </a:r>
+                      <a:r>
                         <a:rPr lang="ru-RU" sz="1400" dirty="0">
                           <a:effectLst/>
                         </a:rPr>
-                        <a:t>511 240 руб.</a:t>
+                        <a:t>руб.</a:t>
                       </a:r>
                       <a:endParaRPr lang="en-US" sz="1400" dirty="0">
                         <a:effectLst/>
@@ -10678,7 +10728,19 @@
           <a:p>
             <a:r>
               <a:rPr lang="ru-RU" sz="2600" dirty="0" smtClean="0"/>
-              <a:t>Список источников</a:t>
+              <a:t>Список</a:t>
+            </a:r>
+            <a:r>
+              <a:rPr lang="en-US" sz="2600" dirty="0" smtClean="0"/>
+              <a:t> </a:t>
+            </a:r>
+            <a:r>
+              <a:rPr lang="ru-RU" sz="2600" dirty="0" smtClean="0"/>
+              <a:t>книжных </a:t>
+            </a:r>
+            <a:r>
+              <a:rPr lang="ru-RU" sz="2600" dirty="0" smtClean="0"/>
+              <a:t>источников</a:t>
             </a:r>
             <a:endParaRPr lang="ru-RU" sz="2600" dirty="0"/>
           </a:p>
@@ -10696,13 +10758,13 @@
         </p:nvSpPr>
         <p:spPr>
           <a:xfrm>
-            <a:off x="533556" y="571898"/>
-            <a:ext cx="9366901" cy="5745775"/>
+            <a:off x="209006" y="177940"/>
+            <a:ext cx="10049691" cy="7544491"/>
           </a:xfrm>
         </p:spPr>
         <p:txBody>
           <a:bodyPr>
-            <a:normAutofit fontScale="92500" lnSpcReduction="20000"/>
+            <a:normAutofit fontScale="92500"/>
           </a:bodyPr>
           <a:lstStyle/>
           <a:p>
@@ -10713,289 +10775,359 @@
               <a:rPr lang="ru-RU" b="1" dirty="0"/>
               <a:t> </a:t>
             </a:r>
-            <a:endParaRPr lang="ru-RU" dirty="0"/>
+            <a:endParaRPr lang="ru-RU" sz="1700" dirty="0"/>
           </a:p>
           <a:p>
             <a:pPr lvl="0"/>
             <a:r>
-              <a:rPr lang="ru-RU" dirty="0" smtClean="0"/>
+              <a:rPr lang="ru-RU" sz="1700" dirty="0" smtClean="0"/>
               <a:t>1. Бёрнс </a:t>
             </a:r>
             <a:r>
-              <a:rPr lang="ru-RU" dirty="0"/>
+              <a:rPr lang="ru-RU" sz="1700" dirty="0"/>
               <a:t>Б. Распределенные системы. Паттерны проектирования. — СПб.: Питер, 2019 — 224 с.: ил. — (Серия «Бестселлеры O’Reilly»). ISBN 978-5-4461-0950-0.</a:t>
             </a:r>
-            <a:endParaRPr lang="en-US" dirty="0"/>
+            <a:endParaRPr lang="en-US" sz="1700" dirty="0"/>
           </a:p>
           <a:p>
             <a:pPr lvl="0"/>
             <a:r>
-              <a:rPr lang="ru-RU" dirty="0" smtClean="0"/>
+              <a:rPr lang="ru-RU" sz="1700" dirty="0" smtClean="0"/>
               <a:t>2. Колисниченко </a:t>
             </a:r>
             <a:r>
-              <a:rPr lang="ru-RU" dirty="0"/>
+              <a:rPr lang="ru-RU" sz="1700" dirty="0"/>
               <a:t>Д. Н. Программирование для Android. Самоучитель. — 3-е изд., перераб. и доп. — СПб.: БХВ-Петербург, 2020. — 288 с.: ил. ISBN 978-5-9775-6587-5.</a:t>
             </a:r>
-            <a:endParaRPr lang="en-US" dirty="0"/>
+            <a:endParaRPr lang="en-US" sz="1700" dirty="0"/>
           </a:p>
           <a:p>
             <a:pPr lvl="0"/>
             <a:r>
-              <a:rPr lang="ru-RU" dirty="0" smtClean="0"/>
+              <a:rPr lang="ru-RU" sz="1700" dirty="0" smtClean="0"/>
               <a:t>3. Рихтер </a:t>
             </a:r>
             <a:r>
-              <a:rPr lang="ru-RU" dirty="0"/>
+              <a:rPr lang="ru-RU" sz="1700" dirty="0"/>
               <a:t>Дж. Clr Via C#. Программирование на платформе Microsoft .NET Framework 4.5 на языке C#. 4-е изд. — СПб.: Питер, 2013. — 896 с.: ил. — (Серия «Мастер-класс»). ISBN 978-5-496-00433-6.</a:t>
             </a:r>
-            <a:endParaRPr lang="en-US" dirty="0"/>
+            <a:endParaRPr lang="en-US" sz="1700" dirty="0"/>
           </a:p>
           <a:p>
             <a:pPr lvl="0"/>
             <a:r>
-              <a:rPr lang="ru-RU" dirty="0" smtClean="0"/>
+              <a:rPr lang="ru-RU" sz="1700" dirty="0" smtClean="0"/>
               <a:t>4. </a:t>
             </a:r>
             <a:r>
-              <a:rPr lang="en-US" dirty="0" smtClean="0"/>
+              <a:rPr lang="en-US" sz="1700" dirty="0" smtClean="0"/>
               <a:t>Hans-Jürgen </a:t>
             </a:r>
             <a:r>
-              <a:rPr lang="en-US" dirty="0"/>
+              <a:rPr lang="en-US" sz="1700" dirty="0"/>
               <a:t>Schönig. Mastering PostgreSQL 13. </a:t>
             </a:r>
             <a:r>
-              <a:rPr lang="ru-RU" dirty="0"/>
+              <a:rPr lang="ru-RU" sz="1700" dirty="0"/>
               <a:t>1-е изд, 2020 - 459 </a:t>
             </a:r>
             <a:r>
-              <a:rPr lang="en-US" dirty="0"/>
+              <a:rPr lang="en-US" sz="1700" dirty="0"/>
               <a:t>c</a:t>
             </a:r>
             <a:r>
-              <a:rPr lang="ru-RU" dirty="0"/>
+              <a:rPr lang="ru-RU" sz="1700" dirty="0"/>
               <a:t>. </a:t>
             </a:r>
             <a:r>
-              <a:rPr lang="en-US" dirty="0"/>
+              <a:rPr lang="en-US" sz="1700" dirty="0"/>
               <a:t>ISBN</a:t>
             </a:r>
             <a:r>
-              <a:rPr lang="ru-RU" dirty="0"/>
+              <a:rPr lang="ru-RU" sz="1700" dirty="0"/>
               <a:t> 978-1-80056-749-8.</a:t>
             </a:r>
-            <a:endParaRPr lang="en-US" dirty="0"/>
+            <a:endParaRPr lang="en-US" sz="1700" dirty="0"/>
           </a:p>
           <a:p>
             <a:pPr lvl="0"/>
             <a:r>
-              <a:rPr lang="ru-RU" dirty="0" smtClean="0"/>
+              <a:rPr lang="ru-RU" sz="1700" dirty="0" smtClean="0"/>
               <a:t>5. Моуэт </a:t>
             </a:r>
             <a:r>
-              <a:rPr lang="ru-RU" dirty="0"/>
+              <a:rPr lang="ru-RU" sz="1700" dirty="0"/>
               <a:t>Э. Использование Docker / пер. с англ. А. В. Снастина; науч. ред. А. А. Маркелов. — М.: ДМК Пресс, 2017. - 354 с.: ил. ISBN 978-5-97060-426-7.</a:t>
             </a:r>
-            <a:endParaRPr lang="en-US" dirty="0"/>
+            <a:endParaRPr lang="en-US" sz="1700" dirty="0"/>
           </a:p>
           <a:p>
             <a:pPr lvl="0"/>
             <a:r>
-              <a:rPr lang="ru-RU" dirty="0" smtClean="0"/>
+              <a:rPr lang="ru-RU" sz="1700" dirty="0" smtClean="0"/>
               <a:t>6. Пирская </a:t>
             </a:r>
             <a:r>
-              <a:rPr lang="ru-RU" dirty="0"/>
+              <a:rPr lang="ru-RU" sz="1700" dirty="0"/>
               <a:t>Л. В. Разработка мобильных приложений в среде Android Studio. 2019. №1. С.120-230. ISBN 978-5-9275-3346-6.</a:t>
             </a:r>
-            <a:endParaRPr lang="en-US" dirty="0"/>
+            <a:endParaRPr lang="en-US" sz="1700" dirty="0"/>
           </a:p>
           <a:p>
             <a:pPr lvl="0"/>
             <a:r>
-              <a:rPr lang="ru-RU" dirty="0" smtClean="0"/>
+              <a:rPr lang="ru-RU" sz="1700" dirty="0" smtClean="0"/>
               <a:t>7. Парахин </a:t>
             </a:r>
             <a:r>
-              <a:rPr lang="ru-RU" dirty="0"/>
+              <a:rPr lang="ru-RU" sz="1700" dirty="0"/>
               <a:t>К.В. Обзор приложения, связанного с автоматизацией деятельности </a:t>
             </a:r>
             <a:r>
-              <a:rPr lang="en-US" dirty="0"/>
+              <a:rPr lang="en-US" sz="1700" dirty="0"/>
               <a:t>IT</a:t>
             </a:r>
             <a:r>
-              <a:rPr lang="ru-RU" dirty="0"/>
+              <a:rPr lang="ru-RU" sz="1700" dirty="0"/>
               <a:t>-отделов предприятия, 2024. №1. С.86-90. ISBN 978-5-398-03137-9 </a:t>
             </a:r>
             <a:r>
-              <a:rPr lang="en-US" dirty="0"/>
+              <a:rPr lang="en-US" sz="1700" dirty="0"/>
               <a:t>URL</a:t>
             </a:r>
             <a:r>
-              <a:rPr lang="ru-RU" dirty="0"/>
+              <a:rPr lang="ru-RU" sz="1700" dirty="0"/>
               <a:t>: </a:t>
             </a:r>
             <a:r>
-              <a:rPr lang="en-US" u="sng" dirty="0">
+              <a:rPr lang="en-US" sz="1700" u="sng" dirty="0">
                 <a:hlinkClick r:id="rId2"/>
               </a:rPr>
               <a:t>http</a:t>
             </a:r>
             <a:r>
-              <a:rPr lang="ru-RU" u="sng" dirty="0">
+              <a:rPr lang="ru-RU" sz="1700" u="sng" dirty="0">
                 <a:hlinkClick r:id="rId2"/>
               </a:rPr>
               <a:t>://</a:t>
             </a:r>
             <a:r>
-              <a:rPr lang="en-US" u="sng" dirty="0">
+              <a:rPr lang="en-US" sz="1700" u="sng" dirty="0">
                 <a:hlinkClick r:id="rId2"/>
               </a:rPr>
               <a:t>www</a:t>
             </a:r>
             <a:r>
-              <a:rPr lang="ru-RU" u="sng" dirty="0">
+              <a:rPr lang="ru-RU" sz="1700" u="sng" dirty="0">
                 <a:hlinkClick r:id="rId2"/>
               </a:rPr>
               <a:t>.</a:t>
             </a:r>
             <a:r>
-              <a:rPr lang="en-US" u="sng" dirty="0">
+              <a:rPr lang="en-US" sz="1700" u="sng" dirty="0">
                 <a:hlinkClick r:id="rId2"/>
               </a:rPr>
               <a:t>bf</a:t>
             </a:r>
             <a:r>
-              <a:rPr lang="ru-RU" u="sng" dirty="0">
+              <a:rPr lang="ru-RU" sz="1700" u="sng" dirty="0">
                 <a:hlinkClick r:id="rId2"/>
               </a:rPr>
               <a:t>.</a:t>
             </a:r>
             <a:r>
-              <a:rPr lang="en-US" u="sng" dirty="0">
+              <a:rPr lang="en-US" sz="1700" u="sng" dirty="0">
                 <a:hlinkClick r:id="rId2"/>
               </a:rPr>
               <a:t>pstu</a:t>
             </a:r>
             <a:r>
-              <a:rPr lang="ru-RU" u="sng" dirty="0">
+              <a:rPr lang="ru-RU" sz="1700" u="sng" dirty="0">
                 <a:hlinkClick r:id="rId2"/>
               </a:rPr>
               <a:t>.</a:t>
             </a:r>
             <a:r>
-              <a:rPr lang="en-US" u="sng" dirty="0">
+              <a:rPr lang="en-US" sz="1700" u="sng" dirty="0">
                 <a:hlinkClick r:id="rId2"/>
               </a:rPr>
               <a:t>ru</a:t>
             </a:r>
             <a:r>
-              <a:rPr lang="ru-RU" u="sng" dirty="0">
+              <a:rPr lang="ru-RU" sz="1700" u="sng" dirty="0">
                 <a:hlinkClick r:id="rId2"/>
               </a:rPr>
               <a:t>/</a:t>
             </a:r>
             <a:r>
-              <a:rPr lang="en-US" u="sng" dirty="0">
+              <a:rPr lang="en-US" sz="1700" u="sng" dirty="0">
                 <a:hlinkClick r:id="rId2"/>
               </a:rPr>
               <a:t>images</a:t>
             </a:r>
             <a:r>
-              <a:rPr lang="ru-RU" u="sng" dirty="0">
+              <a:rPr lang="ru-RU" sz="1700" u="sng" dirty="0">
                 <a:hlinkClick r:id="rId2"/>
               </a:rPr>
               <a:t>/</a:t>
             </a:r>
             <a:r>
-              <a:rPr lang="en-US" u="sng" dirty="0">
+              <a:rPr lang="en-US" sz="1700" u="sng" dirty="0">
                 <a:hlinkClick r:id="rId2"/>
               </a:rPr>
               <a:t>documents</a:t>
             </a:r>
             <a:r>
-              <a:rPr lang="ru-RU" u="sng" dirty="0">
+              <a:rPr lang="ru-RU" sz="1700" u="sng" dirty="0">
                 <a:hlinkClick r:id="rId2"/>
               </a:rPr>
               <a:t>/</a:t>
             </a:r>
             <a:r>
-              <a:rPr lang="en-US" u="sng" dirty="0">
+              <a:rPr lang="en-US" sz="1700" u="sng" dirty="0">
                 <a:hlinkClick r:id="rId2"/>
               </a:rPr>
               <a:t>nauka</a:t>
             </a:r>
             <a:r>
-              <a:rPr lang="ru-RU" u="sng" dirty="0">
+              <a:rPr lang="ru-RU" sz="1700" u="sng" dirty="0">
                 <a:hlinkClick r:id="rId2"/>
               </a:rPr>
               <a:t>/</a:t>
             </a:r>
             <a:r>
-              <a:rPr lang="en-US" u="sng" dirty="0">
+              <a:rPr lang="en-US" sz="1700" u="sng" dirty="0">
                 <a:hlinkClick r:id="rId2"/>
               </a:rPr>
               <a:t>sborniki</a:t>
             </a:r>
             <a:r>
-              <a:rPr lang="ru-RU" u="sng" dirty="0">
+              <a:rPr lang="ru-RU" sz="1700" u="sng" dirty="0">
                 <a:hlinkClick r:id="rId2"/>
               </a:rPr>
               <a:t>/</a:t>
             </a:r>
             <a:r>
-              <a:rPr lang="en-US" u="sng" dirty="0">
+              <a:rPr lang="en-US" sz="1700" u="sng" dirty="0">
                 <a:hlinkClick r:id="rId2"/>
               </a:rPr>
               <a:t>MNRR</a:t>
             </a:r>
             <a:r>
-              <a:rPr lang="ru-RU" u="sng" dirty="0">
+              <a:rPr lang="ru-RU" sz="1700" u="sng" dirty="0">
                 <a:hlinkClick r:id="rId2"/>
               </a:rPr>
               <a:t> 2024_</a:t>
             </a:r>
             <a:r>
-              <a:rPr lang="en-US" u="sng" dirty="0">
+              <a:rPr lang="en-US" sz="1700" u="sng" dirty="0">
                 <a:hlinkClick r:id="rId2"/>
               </a:rPr>
               <a:t>s</a:t>
             </a:r>
             <a:r>
-              <a:rPr lang="ru-RU" u="sng" dirty="0">
+              <a:rPr lang="ru-RU" sz="1700" u="sng" dirty="0">
                 <a:hlinkClick r:id="rId2"/>
               </a:rPr>
               <a:t>_</a:t>
             </a:r>
             <a:r>
-              <a:rPr lang="en-US" u="sng" dirty="0">
+              <a:rPr lang="en-US" sz="1700" u="sng" dirty="0">
                 <a:hlinkClick r:id="rId2"/>
               </a:rPr>
               <a:t>oblozhkoy</a:t>
             </a:r>
             <a:r>
-              <a:rPr lang="ru-RU" u="sng" dirty="0">
+              <a:rPr lang="ru-RU" sz="1700" u="sng" dirty="0">
                 <a:hlinkClick r:id="rId2"/>
               </a:rPr>
               <a:t>.</a:t>
             </a:r>
             <a:r>
-              <a:rPr lang="en-US" u="sng" dirty="0">
+              <a:rPr lang="en-US" sz="1700" u="sng" dirty="0">
                 <a:hlinkClick r:id="rId2"/>
               </a:rPr>
               <a:t>pdf</a:t>
             </a:r>
             <a:r>
-              <a:rPr lang="en-US" dirty="0"/>
+              <a:rPr lang="en-US" sz="1700" dirty="0"/>
               <a:t> </a:t>
             </a:r>
             <a:r>
-              <a:rPr lang="ru-RU" dirty="0"/>
-              <a:t>(дата обращения: 15.03.2024)</a:t>
-            </a:r>
-            <a:endParaRPr lang="en-US" dirty="0"/>
+              <a:rPr lang="ru-RU" sz="1700" dirty="0"/>
+              <a:t>(дата обращения: 15.03.2024</a:t>
+            </a:r>
+            <a:r>
+              <a:rPr lang="ru-RU" sz="1700" dirty="0" smtClean="0"/>
+              <a:t>)</a:t>
+            </a:r>
+          </a:p>
+          <a:p>
+            <a:pPr lvl="0"/>
+            <a:r>
+              <a:rPr lang="ru-RU" sz="1700" dirty="0" smtClean="0"/>
+              <a:t>8. Костров</a:t>
+            </a:r>
+            <a:r>
+              <a:rPr lang="ru-RU" sz="1700" dirty="0"/>
+              <a:t>, А. В. Основы информационного менеджмента [Текст]. — учеб. пособие / А. В. Костров. – 2-е изд., перераб. и доп. - М.: Финансы и статистика [Текст]. — 2009. – 528 с. - ISBN 5-279-02314-0</a:t>
+            </a:r>
+            <a:r>
+              <a:rPr lang="ru-RU" sz="1700" dirty="0" smtClean="0"/>
+              <a:t>;</a:t>
+            </a:r>
+          </a:p>
+          <a:p>
+            <a:pPr lvl="0"/>
+            <a:r>
+              <a:rPr lang="ru-RU" sz="1700" dirty="0" smtClean="0"/>
+              <a:t>9. Карлсон</a:t>
+            </a:r>
+            <a:r>
+              <a:rPr lang="ru-RU" sz="1700" dirty="0"/>
+              <a:t>, Д.П. </a:t>
+            </a:r>
+            <a:r>
+              <a:rPr lang="en-US" sz="1700" dirty="0"/>
+              <a:t>Redis in Action [</a:t>
+            </a:r>
+            <a:r>
+              <a:rPr lang="ru-RU" sz="1700" dirty="0"/>
+              <a:t>Текст] / Д. П. Карлсон – 1-е изд, 2013 - 320 </a:t>
+            </a:r>
+            <a:r>
+              <a:rPr lang="en-US" sz="1700" dirty="0"/>
+              <a:t>c. ISBN </a:t>
+            </a:r>
+            <a:r>
+              <a:rPr lang="en-US" sz="1700" dirty="0" smtClean="0"/>
+              <a:t>78-1617290855</a:t>
+            </a:r>
+            <a:endParaRPr lang="ru-RU" sz="1700" dirty="0" smtClean="0"/>
+          </a:p>
+          <a:p>
+            <a:pPr lvl="0"/>
+            <a:r>
+              <a:rPr lang="ru-RU" sz="1700" dirty="0" smtClean="0"/>
+              <a:t>10. Уиндмилл</a:t>
+            </a:r>
+            <a:r>
+              <a:rPr lang="ru-RU" sz="1700" dirty="0"/>
+              <a:t>, Э.К </a:t>
+            </a:r>
+            <a:r>
+              <a:rPr lang="en-US" sz="1700" dirty="0"/>
+              <a:t>Flutter in Action [</a:t>
+            </a:r>
+            <a:r>
+              <a:rPr lang="ru-RU" sz="1700" dirty="0"/>
+              <a:t>Текст] / Э. К. Уиндмилл – 1-е изд, 2019 - 432 </a:t>
+            </a:r>
+            <a:r>
+              <a:rPr lang="en-US" sz="1700" dirty="0"/>
+              <a:t>c. ISBN 978-5-97060-221-8</a:t>
+            </a:r>
+            <a:endParaRPr lang="en-US" sz="1700" dirty="0"/>
           </a:p>
           <a:p>
             <a:pPr marL="0" indent="0">
@@ -11350,7 +11482,34 @@
             <a:pPr lvl="1"/>
             <a:r>
               <a:rPr lang="ru-RU" sz="2000" dirty="0" smtClean="0"/>
-              <a:t>Оптимизация работы отделов мониторинга и аналитики</a:t>
+              <a:t>Оптимизация работы отделов </a:t>
+            </a:r>
+            <a:r>
+              <a:rPr lang="ru-RU" sz="2000" dirty="0" smtClean="0"/>
+              <a:t>мониторинга</a:t>
+            </a:r>
+            <a:r>
+              <a:rPr lang="en-US" sz="2000" dirty="0" smtClean="0"/>
+              <a:t>, </a:t>
+            </a:r>
+            <a:r>
+              <a:rPr lang="ru-RU" sz="2000" dirty="0" smtClean="0"/>
+              <a:t>а</a:t>
+            </a:r>
+            <a:r>
+              <a:rPr lang="ru-RU" sz="2000" dirty="0" smtClean="0"/>
+              <a:t>налитики и руководителей групп разработки</a:t>
+            </a:r>
+          </a:p>
+          <a:p>
+            <a:pPr lvl="1"/>
+            <a:r>
+              <a:rPr lang="ru-RU" sz="2000" dirty="0" smtClean="0"/>
+              <a:t>Отказ от платных подписочных сервисов и </a:t>
+            </a:r>
+            <a:r>
+              <a:rPr lang="ru-RU" sz="2000" smtClean="0"/>
+              <a:t>внешних услуг</a:t>
             </a:r>
             <a:endParaRPr lang="ru-RU" sz="2000" dirty="0"/>
           </a:p>
